--- a/docs/05-lstm/05-rnn-lstm-slides.pptx
+++ b/docs/05-lstm/05-rnn-lstm-slides.pptx
@@ -20898,7 +20898,7 @@
             </a:r>
             <a:r>
               <a:rPr baseline="-25000" lang="en-US" sz="1300"/>
-              <a:t>t</a:t>
+              <a:t>t-1</a:t>
             </a:r>
             <a:r>
               <a:rPr lang="en-US" sz="1300"/>
@@ -20906,7 +20906,7 @@
             </a:r>
             <a:r>
               <a:rPr baseline="-25000" lang="en-US" sz="1300"/>
-              <a:t>t+1</a:t>
+              <a:t>t</a:t>
             </a:r>
             <a:endParaRPr baseline="-25000" sz="1300"/>
           </a:p>
@@ -21532,7 +21532,7 @@
             </a:pPr>
             <a:r>
               <a:rPr lang="en-US" sz="1000"/>
-              <a:t>Choi and Kumar (2022)</a:t>
+              <a:t>Choi and Kumar (2023)</a:t>
             </a:r>
             <a:br>
               <a:rPr lang="en-US" sz="1000"/>
